--- a/site/clases/parte-1-machine-learning-clasico/081-regularizacion-de-arboles/clase-081-regularizacion-de-arboles-presentacion.pptx
+++ b/site/clases/parte-1-machine-learning-clasico/081-regularizacion-de-arboles/clase-081-regularizacion-de-arboles-presentacion.pptx
@@ -3272,7 +3272,7 @@
                 </a:solidFill>
                 <a:latin typeface="Segoe UI"/>
               </a:rPr>
-              <a:t>Parte: 1 — Machine Learning Clásico · Fuente: Géron, cap. 6.  Duración estimada: 50 min.</a:t>
+              <a:t>Parte: 1 — Machine Learning Clásico · Fuente: Géron, cap. 6.  Duración estimada: 50 min. · Nivel: Intermedio</a:t>
             </a:r>
           </a:p>
         </p:txBody>
@@ -3581,7 +3581,7 @@
                 </a:solidFill>
                 <a:latin typeface="Segoe UI"/>
               </a:rPr>
-              <a:t>Parte: 1 — Machine Learning Clásico · Fuente: Géron, cap. 6.  Duración estimada: 50 min.</a:t>
+              <a:t>Parte: 1 — Machine Learning Clásico · Fuente: Géron, cap. 6.  Duración estimada: 50 min. · Nivel: Intermedio</a:t>
             </a:r>
           </a:p>
         </p:txBody>
@@ -4933,7 +4933,7 @@
                 </a:solidFill>
                 <a:latin typeface="Segoe UI"/>
               </a:rPr>
-              <a:t>Primer bloque ejecutable del notebook.</a:t>
+              <a:t>Un DecisionTreeClassifier() sin tocar nada sobre make_moons(noise=0.4) memoriza el train: accuracy de train ≈ 1 y una brecha grande contra el test.</a:t>
             </a:r>
           </a:p>
         </p:txBody>
@@ -5020,7 +5020,349 @@
                 </a:solidFill>
                 <a:latin typeface="Courier New"/>
               </a:rPr>
-              <a:t># Imports y configuración inicial</a:t>
+              <a:t>import numpy as np</a:t>
+            </a:r>
+          </a:p>
+          <a:p>
+            <a:pPr>
+              <a:defRPr sz="1200" b="0">
+                <a:solidFill>
+                  <a:srgbClr val="F8FAFC"/>
+                </a:solidFill>
+                <a:latin typeface="Courier New"/>
+              </a:defRPr>
+            </a:pPr>
+            <a:r>
+              <a:rPr sz="1200" b="0">
+                <a:solidFill>
+                  <a:srgbClr val="F8FAFC"/>
+                </a:solidFill>
+                <a:latin typeface="Courier New"/>
+              </a:rPr>
+              <a:t>import matplotlib.pyplot as plt</a:t>
+            </a:r>
+          </a:p>
+          <a:p>
+            <a:pPr>
+              <a:defRPr sz="1200" b="0">
+                <a:solidFill>
+                  <a:srgbClr val="F8FAFC"/>
+                </a:solidFill>
+                <a:latin typeface="Courier New"/>
+              </a:defRPr>
+            </a:pPr>
+            <a:r>
+              <a:rPr sz="1200" b="0">
+                <a:solidFill>
+                  <a:srgbClr val="F8FAFC"/>
+                </a:solidFill>
+                <a:latin typeface="Courier New"/>
+              </a:rPr>
+              <a:t>from sklearn.datasets import make_moons</a:t>
+            </a:r>
+          </a:p>
+          <a:p>
+            <a:pPr>
+              <a:defRPr sz="1200" b="0">
+                <a:solidFill>
+                  <a:srgbClr val="F8FAFC"/>
+                </a:solidFill>
+                <a:latin typeface="Courier New"/>
+              </a:defRPr>
+            </a:pPr>
+            <a:r>
+              <a:rPr sz="1200" b="0">
+                <a:solidFill>
+                  <a:srgbClr val="F8FAFC"/>
+                </a:solidFill>
+                <a:latin typeface="Courier New"/>
+              </a:rPr>
+              <a:t>from sklearn.tree import DecisionTreeClassifier</a:t>
+            </a:r>
+          </a:p>
+          <a:p>
+            <a:pPr>
+              <a:defRPr sz="1200" b="0">
+                <a:solidFill>
+                  <a:srgbClr val="F8FAFC"/>
+                </a:solidFill>
+                <a:latin typeface="Courier New"/>
+              </a:defRPr>
+            </a:pPr>
+            <a:r>
+              <a:rPr sz="1200" b="0">
+                <a:solidFill>
+                  <a:srgbClr val="F8FAFC"/>
+                </a:solidFill>
+                <a:latin typeface="Courier New"/>
+              </a:rPr>
+              <a:t>from sklearn.model_selection import train_test_split, GridSearchCV</a:t>
+            </a:r>
+          </a:p>
+          <a:p>
+            <a:pPr>
+              <a:defRPr sz="1200" b="0">
+                <a:solidFill>
+                  <a:srgbClr val="F8FAFC"/>
+                </a:solidFill>
+                <a:latin typeface="Courier New"/>
+              </a:defRPr>
+            </a:pPr>
+            <a:r>
+              <a:rPr sz="1200" b="0">
+                <a:solidFill>
+                  <a:srgbClr val="F8FAFC"/>
+                </a:solidFill>
+                <a:latin typeface="Courier New"/>
+              </a:rPr>
+              <a:t>from sklearn.metrics import accuracy_score</a:t>
+            </a:r>
+          </a:p>
+          <a:p>
+            <a:pPr>
+              <a:defRPr sz="1200" b="0">
+                <a:solidFill>
+                  <a:srgbClr val="F8FAFC"/>
+                </a:solidFill>
+                <a:latin typeface="Courier New"/>
+              </a:defRPr>
+            </a:pPr>
+            <a:r>
+              <a:rPr sz="1200" b="0">
+                <a:solidFill>
+                  <a:srgbClr val="F8FAFC"/>
+                </a:solidFill>
+                <a:latin typeface="Courier New"/>
+              </a:rPr>
+              <a:t> </a:t>
+            </a:r>
+          </a:p>
+          <a:p>
+            <a:pPr>
+              <a:defRPr sz="1200" b="0">
+                <a:solidFill>
+                  <a:srgbClr val="F8FAFC"/>
+                </a:solidFill>
+                <a:latin typeface="Courier New"/>
+              </a:defRPr>
+            </a:pPr>
+            <a:r>
+              <a:rPr sz="1200" b="0">
+                <a:solidFill>
+                  <a:srgbClr val="F8FAFC"/>
+                </a:solidFill>
+                <a:latin typeface="Courier New"/>
+              </a:rPr>
+              <a:t>RND = 42</a:t>
+            </a:r>
+          </a:p>
+          <a:p>
+            <a:pPr>
+              <a:defRPr sz="1200" b="0">
+                <a:solidFill>
+                  <a:srgbClr val="F8FAFC"/>
+                </a:solidFill>
+                <a:latin typeface="Courier New"/>
+              </a:defRPr>
+            </a:pPr>
+            <a:r>
+              <a:rPr sz="1200" b="0">
+                <a:solidFill>
+                  <a:srgbClr val="F8FAFC"/>
+                </a:solidFill>
+                <a:latin typeface="Courier New"/>
+              </a:rPr>
+              <a:t>X, y = make_moons(n_samples=1000, noise=0.4, random_state=RND)</a:t>
+            </a:r>
+          </a:p>
+          <a:p>
+            <a:pPr>
+              <a:defRPr sz="1200" b="0">
+                <a:solidFill>
+                  <a:srgbClr val="F8FAFC"/>
+                </a:solidFill>
+                <a:latin typeface="Courier New"/>
+              </a:defRPr>
+            </a:pPr>
+            <a:r>
+              <a:rPr sz="1200" b="0">
+                <a:solidFill>
+                  <a:srgbClr val="F8FAFC"/>
+                </a:solidFill>
+                <a:latin typeface="Courier New"/>
+              </a:rPr>
+              <a:t>X_train, X_test, y_train, y_test = train_test_split(</a:t>
+            </a:r>
+          </a:p>
+          <a:p>
+            <a:pPr>
+              <a:defRPr sz="1200" b="0">
+                <a:solidFill>
+                  <a:srgbClr val="F8FAFC"/>
+                </a:solidFill>
+                <a:latin typeface="Courier New"/>
+              </a:defRPr>
+            </a:pPr>
+            <a:r>
+              <a:rPr sz="1200" b="0">
+                <a:solidFill>
+                  <a:srgbClr val="F8FAFC"/>
+                </a:solidFill>
+                <a:latin typeface="Courier New"/>
+              </a:rPr>
+              <a:t>    X, y, test_size=0.3, random_state=RND)</a:t>
+            </a:r>
+          </a:p>
+          <a:p>
+            <a:pPr>
+              <a:defRPr sz="1200" b="0">
+                <a:solidFill>
+                  <a:srgbClr val="F8FAFC"/>
+                </a:solidFill>
+                <a:latin typeface="Courier New"/>
+              </a:defRPr>
+            </a:pPr>
+            <a:r>
+              <a:rPr sz="1200" b="0">
+                <a:solidFill>
+                  <a:srgbClr val="F8FAFC"/>
+                </a:solidFill>
+                <a:latin typeface="Courier New"/>
+              </a:rPr>
+              <a:t> </a:t>
+            </a:r>
+          </a:p>
+          <a:p>
+            <a:pPr>
+              <a:defRPr sz="1200" b="0">
+                <a:solidFill>
+                  <a:srgbClr val="F8FAFC"/>
+                </a:solidFill>
+                <a:latin typeface="Courier New"/>
+              </a:defRPr>
+            </a:pPr>
+            <a:r>
+              <a:rPr sz="1200" b="0">
+                <a:solidFill>
+                  <a:srgbClr val="F8FAFC"/>
+                </a:solidFill>
+                <a:latin typeface="Courier New"/>
+              </a:rPr>
+              <a:t>base = DecisionTreeClassifier(random_state=RND).fit(X_train, y_train)</a:t>
+            </a:r>
+          </a:p>
+          <a:p>
+            <a:pPr>
+              <a:defRPr sz="1200" b="0">
+                <a:solidFill>
+                  <a:srgbClr val="F8FAFC"/>
+                </a:solidFill>
+                <a:latin typeface="Courier New"/>
+              </a:defRPr>
+            </a:pPr>
+            <a:r>
+              <a:rPr sz="1200" b="0">
+                <a:solidFill>
+                  <a:srgbClr val="F8FAFC"/>
+                </a:solidFill>
+                <a:latin typeface="Courier New"/>
+              </a:rPr>
+              <a:t>acc_tr = accuracy_score(y_train, base.predict(X_train))</a:t>
+            </a:r>
+          </a:p>
+          <a:p>
+            <a:pPr>
+              <a:defRPr sz="1200" b="0">
+                <a:solidFill>
+                  <a:srgbClr val="F8FAFC"/>
+                </a:solidFill>
+                <a:latin typeface="Courier New"/>
+              </a:defRPr>
+            </a:pPr>
+            <a:r>
+              <a:rPr sz="1200" b="0">
+                <a:solidFill>
+                  <a:srgbClr val="F8FAFC"/>
+                </a:solidFill>
+                <a:latin typeface="Courier New"/>
+              </a:rPr>
+              <a:t>acc_te = accuracy_score(y_test, base.predict(X_test))</a:t>
+            </a:r>
+          </a:p>
+          <a:p>
+            <a:pPr>
+              <a:defRPr sz="1200" b="0">
+                <a:solidFill>
+                  <a:srgbClr val="F8FAFC"/>
+                </a:solidFill>
+                <a:latin typeface="Courier New"/>
+              </a:defRPr>
+            </a:pPr>
+            <a:r>
+              <a:rPr sz="1200" b="0">
+                <a:solidFill>
+                  <a:srgbClr val="F8FAFC"/>
+                </a:solidFill>
+                <a:latin typeface="Courier New"/>
+              </a:rPr>
+              <a:t>print(f"baseline: acc_train={acc_tr:.3f}  acc_test={acc_te:.3f}")</a:t>
+            </a:r>
+          </a:p>
+          <a:p>
+            <a:pPr>
+              <a:defRPr sz="1200" b="0">
+                <a:solidFill>
+                  <a:srgbClr val="F8FAFC"/>
+                </a:solidFill>
+                <a:latin typeface="Courier New"/>
+              </a:defRPr>
+            </a:pPr>
+            <a:r>
+              <a:rPr sz="1200" b="0">
+                <a:solidFill>
+                  <a:srgbClr val="F8FAFC"/>
+                </a:solidFill>
+                <a:latin typeface="Courier New"/>
+              </a:rPr>
+              <a:t>print(f"gap train-test: {acc_tr - acc_te:.3f}")</a:t>
+            </a:r>
+          </a:p>
+          <a:p>
+            <a:pPr>
+              <a:defRPr sz="1200" b="0">
+                <a:solidFill>
+                  <a:srgbClr val="F8FAFC"/>
+                </a:solidFill>
+                <a:latin typeface="Courier New"/>
+              </a:defRPr>
+            </a:pPr>
+            <a:r>
+              <a:rPr sz="1200" b="0">
+                <a:solidFill>
+                  <a:srgbClr val="F8FAFC"/>
+                </a:solidFill>
+                <a:latin typeface="Courier New"/>
+              </a:rPr>
+              <a:t>assert acc_tr &gt; acc_te, "el arbol sin regularizar overfittea"</a:t>
+            </a:r>
+          </a:p>
+          <a:p>
+            <a:pPr>
+              <a:defRPr sz="1200" b="0">
+                <a:solidFill>
+                  <a:srgbClr val="F8FAFC"/>
+                </a:solidFill>
+                <a:latin typeface="Courier New"/>
+              </a:defRPr>
+            </a:pPr>
+            <a:r>
+              <a:rPr sz="1200" b="0">
+                <a:solidFill>
+                  <a:srgbClr val="F8FAFC"/>
+                </a:solidFill>
+                <a:latin typeface="Courier New"/>
+              </a:rPr>
+              <a:t>print("train casi perfecto y brecha grande = overfitting")</a:t>
             </a:r>
           </a:p>
         </p:txBody>
